--- a/食光智语-冲刺计划与总结.pptx
+++ b/食光智语-冲刺计划与总结.pptx
@@ -20969,30 +20969,6 @@
           </a:p>
         </p:txBody>
       </p:sp>
-      <p:pic>
-        <p:nvPicPr>
-          <p:cNvPr id="18" name="Picture 18"/>
-          <p:cNvPicPr>
-            <a:picLocks noChangeAspect="1"/>
-          </p:cNvPicPr>
-          <p:nvPr/>
-        </p:nvPicPr>
-        <p:blipFill>
-          <a:blip r:embed="rId5"/>
-          <a:stretch>
-            <a:fillRect/>
-          </a:stretch>
-        </p:blipFill>
-        <p:spPr>
-          <a:xfrm>
-            <a:off x="10668000" y="6190112"/>
-            <a:ext cx="1524000" cy="667888"/>
-          </a:xfrm>
-          <a:prstGeom prst="rect">
-            <a:avLst/>
-          </a:prstGeom>
-        </p:spPr>
-      </p:pic>
     </p:spTree>
   </p:cSld>
   <p:clrMapOvr>
